--- a/OrangeEnglish_Lesson4_StructuringTheResponse.pptx
+++ b/OrangeEnglish_Lesson4_StructuringTheResponse.pptx
@@ -2624,7 +2624,7 @@
                 <a:ea typeface="Inter" pitchFamily="34" charset="-122"/>
                 <a:cs typeface="Inter" pitchFamily="34" charset="-120"/>
               </a:rPr>
-              <a:t>Lesson 4 of 6 · IELTS Writing Task 1 · orangeenglish.nl</a:t>
+              <a:t>Lesson 4 of 8 · IELTS Writing Task 1 · orangeenglish.nl</a:t>
             </a:r>
             <a:endParaRPr lang="en-US" sz="1800" dirty="0"/>
           </a:p>
@@ -3287,7 +3287,7 @@
                 <a:ea typeface="Inter" pitchFamily="34" charset="-122"/>
                 <a:cs typeface="Inter" pitchFamily="34" charset="-120"/>
               </a:rPr>
-              <a:t>Lesson 4 of 6 · IELTS Writing Task 1 · orangeenglish.nl</a:t>
+              <a:t>Lesson 4 of 8 · IELTS Writing Task 1 · orangeenglish.nl</a:t>
             </a:r>
             <a:endParaRPr lang="en-US" sz="1800" dirty="0"/>
           </a:p>
@@ -3922,7 +3922,7 @@
                 <a:ea typeface="Inter" pitchFamily="34" charset="-122"/>
                 <a:cs typeface="Inter" pitchFamily="34" charset="-120"/>
               </a:rPr>
-              <a:t>Lesson 4 of 6 · IELTS Writing Task 1 · orangeenglish.nl</a:t>
+              <a:t>Lesson 4 of 8 · IELTS Writing Task 1 · orangeenglish.nl</a:t>
             </a:r>
             <a:endParaRPr lang="en-US" sz="1800" dirty="0"/>
           </a:p>
@@ -5081,7 +5081,7 @@
                 <a:ea typeface="Inter" pitchFamily="34" charset="-122"/>
                 <a:cs typeface="Inter" pitchFamily="34" charset="-120"/>
               </a:rPr>
-              <a:t>Lesson 4 of 6 · IELTS Writing Task 1 · orangeenglish.nl</a:t>
+              <a:t>Lesson 4 of 8 · IELTS Writing Task 1 · orangeenglish.nl</a:t>
             </a:r>
             <a:endParaRPr lang="en-US" sz="1800" dirty="0"/>
           </a:p>
@@ -6296,7 +6296,7 @@
                 <a:ea typeface="Inter" pitchFamily="34" charset="-122"/>
                 <a:cs typeface="Inter" pitchFamily="34" charset="-120"/>
               </a:rPr>
-              <a:t>Lesson 4 of 6 · IELTS Writing Task 1 · orangeenglish.nl</a:t>
+              <a:t>Lesson 4 of 8 · IELTS Writing Task 1 · orangeenglish.nl</a:t>
             </a:r>
             <a:endParaRPr lang="en-US" sz="1800" dirty="0"/>
           </a:p>
@@ -7065,7 +7065,7 @@
                 <a:ea typeface="Inter" pitchFamily="34" charset="-122"/>
                 <a:cs typeface="Inter" pitchFamily="34" charset="-120"/>
               </a:rPr>
-              <a:t>Lesson 4 of 6 · IELTS Writing Task 1 · orangeenglish.nl</a:t>
+              <a:t>Lesson 4 of 8 · IELTS Writing Task 1 · orangeenglish.nl</a:t>
             </a:r>
             <a:endParaRPr lang="en-US" sz="1800" dirty="0"/>
           </a:p>
@@ -8177,7 +8177,7 @@
                 <a:ea typeface="Inter" pitchFamily="34" charset="-122"/>
                 <a:cs typeface="Inter" pitchFamily="34" charset="-120"/>
               </a:rPr>
-              <a:t>Lesson 4 of 6 · IELTS Writing Task 1 · orangeenglish.nl</a:t>
+              <a:t>Lesson 4 of 8 · IELTS Writing Task 1 · orangeenglish.nl</a:t>
             </a:r>
             <a:endParaRPr lang="en-US" sz="1800" dirty="0"/>
           </a:p>
@@ -8910,7 +8910,7 @@
                 <a:ea typeface="Inter" pitchFamily="34" charset="-122"/>
                 <a:cs typeface="Inter" pitchFamily="34" charset="-120"/>
               </a:rPr>
-              <a:t>Lesson 4 of 6 · IELTS Writing Task 1 · orangeenglish.nl</a:t>
+              <a:t>Lesson 4 of 8 · IELTS Writing Task 1 · orangeenglish.nl</a:t>
             </a:r>
             <a:endParaRPr lang="en-US" sz="1800" dirty="0"/>
           </a:p>

--- a/OrangeEnglish_Lesson4_StructuringTheResponse.pptx
+++ b/OrangeEnglish_Lesson4_StructuringTheResponse.pptx
@@ -1599,6 +1599,10 @@
           </a:solidFill>
           <a:ln/>
         </p:spPr>
+        <p:txBody>
+          <a:bodyPr/>
+          <a:p/>
+        </p:txBody>
       </p:sp>
       <p:pic>
         <p:nvPicPr>
@@ -1887,7 +1891,7 @@
                 <a:ea typeface="Inter" pitchFamily="34" charset="-122"/>
                 <a:cs typeface="Inter" pitchFamily="34" charset="-120"/>
               </a:rPr>
-              <a:t>The four-part shape examiners expect from every Task 1 answer.</a:t>
+              <a:t>A reliable four-part shape for line-graph answers.</a:t>
             </a:r>
             <a:endParaRPr lang="en-US" sz="2700" dirty="0"/>
           </a:p>
@@ -1968,6 +1972,10 @@
           </a:solidFill>
           <a:ln/>
         </p:spPr>
+        <p:txBody>
+          <a:bodyPr/>
+          <a:p/>
+        </p:txBody>
       </p:sp>
       <p:pic>
         <p:nvPicPr>
@@ -2190,7 +2198,7 @@
                 <a:ea typeface="Inter" pitchFamily="34" charset="-122"/>
                 <a:cs typeface="Inter" pitchFamily="34" charset="-120"/>
               </a:rPr>
-              <a:t>both reward an answer organised into four clear stages. Strong vocabulary and grammar can't rescue a response that buries the overview in the middle of a paragraph.</a:t>
+              <a:t>both reward a clearly organised answer with a clear overview. Strong vocabulary and grammar can't rescue a response that buries the overview in the middle of a paragraph.</a:t>
             </a:r>
             <a:endParaRPr lang="en-US" sz="2550" dirty="0"/>
           </a:p>
@@ -2624,7 +2632,7 @@
                 <a:ea typeface="Inter" pitchFamily="34" charset="-122"/>
                 <a:cs typeface="Inter" pitchFamily="34" charset="-120"/>
               </a:rPr>
-              <a:t>Lesson 4 of 8 · IELTS Writing Task 1 · orangeenglish.nl</a:t>
+              <a:t>Lesson 4 of 6 · IELTS Writing Task 1 · orangeenglish.nl</a:t>
             </a:r>
             <a:endParaRPr lang="en-US" sz="1800" dirty="0"/>
           </a:p>
@@ -2715,6 +2723,10 @@
           </a:solidFill>
           <a:ln/>
         </p:spPr>
+        <p:txBody>
+          <a:bodyPr/>
+          <a:p/>
+        </p:txBody>
       </p:sp>
       <p:pic>
         <p:nvPicPr>
@@ -3026,6 +3038,10 @@
             <a:prstDash val="solid"/>
           </a:ln>
         </p:spPr>
+        <p:txBody>
+          <a:bodyPr/>
+          <a:p/>
+        </p:txBody>
       </p:sp>
       <p:sp>
         <p:nvSpPr>
@@ -3166,6 +3182,10 @@
             <a:prstDash val="solid"/>
           </a:ln>
         </p:spPr>
+        <p:txBody>
+          <a:bodyPr/>
+          <a:p/>
+        </p:txBody>
       </p:sp>
       <p:sp>
         <p:nvSpPr>
@@ -3287,7 +3307,7 @@
                 <a:ea typeface="Inter" pitchFamily="34" charset="-122"/>
                 <a:cs typeface="Inter" pitchFamily="34" charset="-120"/>
               </a:rPr>
-              <a:t>Lesson 4 of 8 · IELTS Writing Task 1 · orangeenglish.nl</a:t>
+              <a:t>Lesson 4 of 6 · IELTS Writing Task 1 · orangeenglish.nl</a:t>
             </a:r>
             <a:endParaRPr lang="en-US" sz="1800" dirty="0"/>
           </a:p>
@@ -3378,6 +3398,10 @@
           </a:solidFill>
           <a:ln/>
         </p:spPr>
+        <p:txBody>
+          <a:bodyPr/>
+          <a:p/>
+        </p:txBody>
       </p:sp>
       <p:pic>
         <p:nvPicPr>
@@ -3505,7 +3529,7 @@
                 <a:ea typeface="Montserrat" pitchFamily="34" charset="-122"/>
                 <a:cs typeface="Montserrat" pitchFamily="34" charset="-120"/>
               </a:rPr>
-              <a:t>The overview comes second, and it has</a:t>
+              <a:t>The overview comes early, and it's the</a:t>
             </a:r>
             <a:endParaRPr lang="en-US" sz="3900" dirty="0"/>
           </a:p>
@@ -3529,7 +3553,7 @@
         </p:blipFill>
         <p:spPr>
           <a:xfrm>
-            <a:off x="11409090" y="1266825"/>
+            <a:off x="10901090" y="1266825"/>
             <a:ext cx="3369990" cy="573732"/>
           </a:xfrm>
           <a:prstGeom prst="rect">
@@ -3545,7 +3569,7 @@
         </p:nvSpPr>
         <p:spPr>
           <a:xfrm>
-            <a:off x="11523390" y="1238250"/>
+            <a:off x="11015390" y="1238250"/>
             <a:ext cx="3455529" cy="642938"/>
           </a:xfrm>
           <a:prstGeom prst="rect">
@@ -3575,7 +3599,7 @@
                 <a:ea typeface="Montserrat" pitchFamily="34" charset="-122"/>
                 <a:cs typeface="Montserrat" pitchFamily="34" charset="-120"/>
               </a:rPr>
-              <a:t>no numbers</a:t>
+              <a:t>big picture</a:t>
             </a:r>
             <a:endParaRPr lang="en-US" sz="3900" dirty="0"/>
           </a:p>
@@ -3589,7 +3613,7 @@
         </p:nvSpPr>
         <p:spPr>
           <a:xfrm>
-            <a:off x="14664779" y="1238250"/>
+            <a:off x="14156779" y="1238250"/>
             <a:ext cx="206201" cy="642938"/>
           </a:xfrm>
           <a:prstGeom prst="rect">
@@ -3663,7 +3687,7 @@
                 <a:ea typeface="Inter" pitchFamily="34" charset="-122"/>
                 <a:cs typeface="Inter" pitchFamily="34" charset="-120"/>
               </a:rPr>
-              <a:t>One to two sentences, right after the introduction. Summarise the two or three biggest patterns, in general terms only. Save every figure for the body paragraphs.</a:t>
+              <a:t>One to two sentences, straight after the introduction in this course. Summarise the two or three biggest patterns in general terms, and save detailed figures for the body paragraphs.</a:t>
             </a:r>
             <a:endParaRPr lang="en-US" sz="2325" dirty="0"/>
           </a:p>
@@ -3699,6 +3723,10 @@
             <a:prstDash val="solid"/>
           </a:ln>
         </p:spPr>
+        <p:txBody>
+          <a:bodyPr/>
+          <a:p/>
+        </p:txBody>
       </p:sp>
       <p:sp>
         <p:nvSpPr>
@@ -3719,6 +3747,10 @@
           </a:solidFill>
           <a:ln/>
         </p:spPr>
+        <p:txBody>
+          <a:bodyPr/>
+          <a:p/>
+        </p:txBody>
       </p:sp>
       <p:sp>
         <p:nvSpPr>
@@ -3922,7 +3954,7 @@
                 <a:ea typeface="Inter" pitchFamily="34" charset="-122"/>
                 <a:cs typeface="Inter" pitchFamily="34" charset="-120"/>
               </a:rPr>
-              <a:t>Lesson 4 of 8 · IELTS Writing Task 1 · orangeenglish.nl</a:t>
+              <a:t>Lesson 4 of 6 · IELTS Writing Task 1 · orangeenglish.nl</a:t>
             </a:r>
             <a:endParaRPr lang="en-US" sz="1800" dirty="0"/>
           </a:p>
@@ -4013,6 +4045,10 @@
           </a:solidFill>
           <a:ln/>
         </p:spPr>
+        <p:txBody>
+          <a:bodyPr/>
+          <a:p/>
+        </p:txBody>
       </p:sp>
       <p:pic>
         <p:nvPicPr>
@@ -4324,6 +4360,10 @@
             <a:prstDash val="solid"/>
           </a:ln>
         </p:spPr>
+        <p:txBody>
+          <a:bodyPr/>
+          <a:p/>
+        </p:txBody>
       </p:sp>
       <p:sp>
         <p:nvSpPr>
@@ -4387,6 +4427,10 @@
           </a:solidFill>
           <a:ln/>
         </p:spPr>
+        <p:txBody>
+          <a:bodyPr/>
+          <a:p/>
+        </p:txBody>
       </p:sp>
       <p:sp>
         <p:nvSpPr>
@@ -4511,6 +4555,10 @@
           </a:solidFill>
           <a:ln/>
         </p:spPr>
+        <p:txBody>
+          <a:bodyPr/>
+          <a:p/>
+        </p:txBody>
       </p:sp>
       <p:sp>
         <p:nvSpPr>
@@ -4644,6 +4692,10 @@
             <a:prstDash val="solid"/>
           </a:ln>
         </p:spPr>
+        <p:txBody>
+          <a:bodyPr/>
+          <a:p/>
+        </p:txBody>
       </p:sp>
       <p:sp>
         <p:nvSpPr>
@@ -4707,6 +4759,10 @@
           </a:solidFill>
           <a:ln/>
         </p:spPr>
+        <p:txBody>
+          <a:bodyPr/>
+          <a:p/>
+        </p:txBody>
       </p:sp>
       <p:sp>
         <p:nvSpPr>
@@ -4814,6 +4870,10 @@
           </a:solidFill>
           <a:ln/>
         </p:spPr>
+        <p:txBody>
+          <a:bodyPr/>
+          <a:p/>
+        </p:txBody>
       </p:sp>
       <p:sp>
         <p:nvSpPr>
@@ -4923,6 +4983,10 @@
           </a:solidFill>
           <a:ln/>
         </p:spPr>
+        <p:txBody>
+          <a:bodyPr/>
+          <a:p/>
+        </p:txBody>
       </p:sp>
       <p:sp>
         <p:nvSpPr>
@@ -5081,7 +5145,7 @@
                 <a:ea typeface="Inter" pitchFamily="34" charset="-122"/>
                 <a:cs typeface="Inter" pitchFamily="34" charset="-120"/>
               </a:rPr>
-              <a:t>Lesson 4 of 8 · IELTS Writing Task 1 · orangeenglish.nl</a:t>
+              <a:t>Lesson 4 of 6 · IELTS Writing Task 1 · orangeenglish.nl</a:t>
             </a:r>
             <a:endParaRPr lang="en-US" sz="1800" dirty="0"/>
           </a:p>
@@ -5172,6 +5236,10 @@
           </a:solidFill>
           <a:ln/>
         </p:spPr>
+        <p:txBody>
+          <a:bodyPr/>
+          <a:p/>
+        </p:txBody>
       </p:sp>
       <p:pic>
         <p:nvPicPr>
@@ -5328,6 +5396,10 @@
           </a:solidFill>
           <a:ln/>
         </p:spPr>
+        <p:txBody>
+          <a:bodyPr/>
+          <a:p/>
+        </p:txBody>
       </p:sp>
       <p:sp>
         <p:nvSpPr>
@@ -5350,6 +5422,10 @@
           </a:solidFill>
           <a:ln/>
         </p:spPr>
+        <p:txBody>
+          <a:bodyPr/>
+          <a:p/>
+        </p:txBody>
       </p:sp>
       <p:sp>
         <p:nvSpPr>
@@ -5372,6 +5448,10 @@
           </a:solidFill>
           <a:ln/>
         </p:spPr>
+        <p:txBody>
+          <a:bodyPr/>
+          <a:p/>
+        </p:txBody>
       </p:sp>
       <p:sp>
         <p:nvSpPr>
@@ -5392,6 +5472,10 @@
           </a:solidFill>
           <a:ln/>
         </p:spPr>
+        <p:txBody>
+          <a:bodyPr/>
+          <a:p/>
+        </p:txBody>
       </p:sp>
       <p:sp>
         <p:nvSpPr>
@@ -5414,6 +5498,10 @@
           </a:solidFill>
           <a:ln/>
         </p:spPr>
+        <p:txBody>
+          <a:bodyPr/>
+          <a:p/>
+        </p:txBody>
       </p:sp>
       <p:sp>
         <p:nvSpPr>
@@ -5567,6 +5655,10 @@
           </a:solidFill>
           <a:ln/>
         </p:spPr>
+        <p:txBody>
+          <a:bodyPr/>
+          <a:p/>
+        </p:txBody>
       </p:sp>
       <p:sp>
         <p:nvSpPr>
@@ -5589,6 +5681,10 @@
           </a:solidFill>
           <a:ln/>
         </p:spPr>
+        <p:txBody>
+          <a:bodyPr/>
+          <a:p/>
+        </p:txBody>
       </p:sp>
       <p:sp>
         <p:nvSpPr>
@@ -5611,6 +5707,10 @@
           </a:solidFill>
           <a:ln/>
         </p:spPr>
+        <p:txBody>
+          <a:bodyPr/>
+          <a:p/>
+        </p:txBody>
       </p:sp>
       <p:sp>
         <p:nvSpPr>
@@ -5631,6 +5731,10 @@
           </a:solidFill>
           <a:ln/>
         </p:spPr>
+        <p:txBody>
+          <a:bodyPr/>
+          <a:p/>
+        </p:txBody>
       </p:sp>
       <p:sp>
         <p:nvSpPr>
@@ -5653,6 +5757,10 @@
           </a:solidFill>
           <a:ln/>
         </p:spPr>
+        <p:txBody>
+          <a:bodyPr/>
+          <a:p/>
+        </p:txBody>
       </p:sp>
       <p:sp>
         <p:nvSpPr>
@@ -5777,7 +5885,7 @@
                 <a:ea typeface="Inter" pitchFamily="34" charset="-122"/>
                 <a:cs typeface="Inter" pitchFamily="34" charset="-120"/>
               </a:rPr>
-              <a:t>General trends only, no numbers.</a:t>
+              <a:t>The main patterns, without detailed figures.</a:t>
             </a:r>
             <a:endParaRPr lang="en-US" sz="2250" dirty="0"/>
           </a:p>
@@ -5806,6 +5914,10 @@
           </a:solidFill>
           <a:ln/>
         </p:spPr>
+        <p:txBody>
+          <a:bodyPr/>
+          <a:p/>
+        </p:txBody>
       </p:sp>
       <p:sp>
         <p:nvSpPr>
@@ -5828,6 +5940,10 @@
           </a:solidFill>
           <a:ln/>
         </p:spPr>
+        <p:txBody>
+          <a:bodyPr/>
+          <a:p/>
+        </p:txBody>
       </p:sp>
       <p:sp>
         <p:nvSpPr>
@@ -5850,6 +5966,10 @@
           </a:solidFill>
           <a:ln/>
         </p:spPr>
+        <p:txBody>
+          <a:bodyPr/>
+          <a:p/>
+        </p:txBody>
       </p:sp>
       <p:sp>
         <p:nvSpPr>
@@ -5870,6 +5990,10 @@
           </a:solidFill>
           <a:ln/>
         </p:spPr>
+        <p:txBody>
+          <a:bodyPr/>
+          <a:p/>
+        </p:txBody>
       </p:sp>
       <p:sp>
         <p:nvSpPr>
@@ -5892,6 +6016,10 @@
           </a:solidFill>
           <a:ln/>
         </p:spPr>
+        <p:txBody>
+          <a:bodyPr/>
+          <a:p/>
+        </p:txBody>
       </p:sp>
       <p:sp>
         <p:nvSpPr>
@@ -6045,6 +6173,10 @@
           </a:solidFill>
           <a:ln/>
         </p:spPr>
+        <p:txBody>
+          <a:bodyPr/>
+          <a:p/>
+        </p:txBody>
       </p:sp>
       <p:sp>
         <p:nvSpPr>
@@ -6067,6 +6199,10 @@
           </a:solidFill>
           <a:ln/>
         </p:spPr>
+        <p:txBody>
+          <a:bodyPr/>
+          <a:p/>
+        </p:txBody>
       </p:sp>
       <p:sp>
         <p:nvSpPr>
@@ -6089,6 +6225,10 @@
           </a:solidFill>
           <a:ln/>
         </p:spPr>
+        <p:txBody>
+          <a:bodyPr/>
+          <a:p/>
+        </p:txBody>
       </p:sp>
       <p:sp>
         <p:nvSpPr>
@@ -6109,6 +6249,10 @@
           </a:solidFill>
           <a:ln/>
         </p:spPr>
+        <p:txBody>
+          <a:bodyPr/>
+          <a:p/>
+        </p:txBody>
       </p:sp>
       <p:sp>
         <p:nvSpPr>
@@ -6131,6 +6275,10 @@
           </a:solidFill>
           <a:ln/>
         </p:spPr>
+        <p:txBody>
+          <a:bodyPr/>
+          <a:p/>
+        </p:txBody>
       </p:sp>
       <p:sp>
         <p:nvSpPr>
@@ -6296,7 +6444,7 @@
                 <a:ea typeface="Inter" pitchFamily="34" charset="-122"/>
                 <a:cs typeface="Inter" pitchFamily="34" charset="-120"/>
               </a:rPr>
-              <a:t>Lesson 4 of 8 · IELTS Writing Task 1 · orangeenglish.nl</a:t>
+              <a:t>Lesson 4 of 6 · IELTS Writing Task 1 · orangeenglish.nl</a:t>
             </a:r>
             <a:endParaRPr lang="en-US" sz="1800" dirty="0"/>
           </a:p>
@@ -6387,6 +6535,10 @@
           </a:solidFill>
           <a:ln/>
         </p:spPr>
+        <p:txBody>
+          <a:bodyPr/>
+          <a:p/>
+        </p:txBody>
       </p:sp>
       <p:pic>
         <p:nvPicPr>
@@ -6550,6 +6702,10 @@
             <a:prstDash val="solid"/>
           </a:ln>
         </p:spPr>
+        <p:txBody>
+          <a:bodyPr/>
+          <a:p/>
+        </p:txBody>
       </p:sp>
       <p:sp>
         <p:nvSpPr>
@@ -6712,7 +6868,7 @@
                 <a:ea typeface="Caveat" pitchFamily="34" charset="-122"/>
                 <a:cs typeface="Caveat" pitchFamily="34" charset="-120"/>
               </a:rPr>
-              <a:t>numbers belong in the body, not here</a:t>
+              <a:t>recounts detail instead of summarising the pattern</a:t>
             </a:r>
             <a:endParaRPr lang="en-US" sz="2250" dirty="0"/>
           </a:p>
@@ -6748,6 +6904,10 @@
             <a:prstDash val="solid"/>
           </a:ln>
         </p:spPr>
+        <p:txBody>
+          <a:bodyPr/>
+          <a:p/>
+        </p:txBody>
       </p:sp>
       <p:sp>
         <p:nvSpPr>
@@ -6840,7 +7000,7 @@
         <p:spPr>
           <a:xfrm>
             <a:off x="1666875" y="6179046"/>
-            <a:ext cx="3261461" cy="442913"/>
+            <a:ext cx="14102340" cy="926306"/>
           </a:xfrm>
           <a:prstGeom prst="rect">
             <a:avLst/>
@@ -6869,69 +7029,11 @@
                 <a:ea typeface="Inter" pitchFamily="34" charset="-122"/>
                 <a:cs typeface="Inter" pitchFamily="34" charset="-120"/>
               </a:rPr>
-              <a:t>"Overall, museum A</a:t>
+              <a:t>"Overall, museum A </a:t>
             </a:r>
             <a:endParaRPr lang="en-US" sz="2625" dirty="0"/>
-          </a:p>
-        </p:txBody>
-      </p:sp>
-      <p:pic>
-        <p:nvPicPr>
-          <p:cNvPr id="16" name="Image 2" descr="preencoded.png">    </p:cNvPr>
-          <p:cNvPicPr>
-            <a:picLocks noChangeAspect="1"/>
-          </p:cNvPicPr>
-          <p:nvPr/>
-        </p:nvPicPr>
-        <p:blipFill>
-          <a:blip r:embed="rId3">
-            <a:alphaModFix amt="95000"/>
-          </a:blip>
-          <a:stretch>
-            <a:fillRect/>
-          </a:stretch>
-        </p:blipFill>
-        <p:spPr>
-          <a:xfrm>
-            <a:off x="4845993" y="6140946"/>
-            <a:ext cx="5111055" cy="502444"/>
-          </a:xfrm>
-          <a:prstGeom prst="rect">
-            <a:avLst/>
-          </a:prstGeom>
-        </p:spPr>
-      </p:pic>
-      <p:sp>
-        <p:nvSpPr>
-          <p:cNvPr id="17" name="Text 12"/>
-          <p:cNvSpPr/>
-          <p:nvPr/>
-        </p:nvSpPr>
-        <p:spPr>
-          <a:xfrm>
-            <a:off x="4922193" y="6179046"/>
-            <a:ext cx="5454521" cy="442913"/>
-          </a:xfrm>
-          <a:prstGeom prst="rect">
-            <a:avLst/>
-          </a:prstGeom>
-          <a:noFill/>
-          <a:ln/>
-        </p:spPr>
-        <p:txBody>
-          <a:bodyPr wrap="none" lIns="25400" tIns="25400" rIns="25400" bIns="25400" rtlCol="0" anchor="t">
-            <a:normAutofit/>
-          </a:bodyPr>
-          <a:lstStyle/>
-          <a:p>
-            <a:pPr algn="l" indent="0" marL="0">
-              <a:lnSpc>
-                <a:spcPct val="145000"/>
-              </a:lnSpc>
-              <a:buNone/>
-            </a:pPr>
-            <a:r>
-              <a:rPr lang="en-US" sz="2625" b="1" dirty="0">
+            <a:r>
+              <a:rPr lang="en-US" sz="2625" dirty="0" b="1">
                 <a:solidFill>
                   <a:srgbClr val="292929"/>
                 </a:solidFill>
@@ -6941,39 +7043,6 @@
               </a:rPr>
               <a:t>consistently attracted far more</a:t>
             </a:r>
-            <a:endParaRPr lang="en-US" sz="2625" dirty="0"/>
-          </a:p>
-        </p:txBody>
-      </p:sp>
-      <p:sp>
-        <p:nvSpPr>
-          <p:cNvPr id="18" name="Text 13"/>
-          <p:cNvSpPr/>
-          <p:nvPr/>
-        </p:nvSpPr>
-        <p:spPr>
-          <a:xfrm>
-            <a:off x="1666875" y="6179046"/>
-            <a:ext cx="14102340" cy="926306"/>
-          </a:xfrm>
-          <a:prstGeom prst="rect">
-            <a:avLst/>
-          </a:prstGeom>
-          <a:noFill/>
-          <a:ln/>
-        </p:spPr>
-        <p:txBody>
-          <a:bodyPr wrap="square" lIns="0" tIns="0" rIns="0" bIns="0" rtlCol="0" anchor="t">
-            <a:normAutofit/>
-          </a:bodyPr>
-          <a:lstStyle/>
-          <a:p>
-            <a:pPr algn="l" indent="0" marL="0">
-              <a:lnSpc>
-                <a:spcPct val="145000"/>
-              </a:lnSpc>
-              <a:buNone/>
-            </a:pPr>
             <a:r>
               <a:rPr lang="en-US" sz="2625" dirty="0">
                 <a:solidFill>
@@ -6983,9 +7052,8 @@
                 <a:ea typeface="Inter" pitchFamily="34" charset="-122"/>
                 <a:cs typeface="Inter" pitchFamily="34" charset="-120"/>
               </a:rPr>
-              <a:t>visitors than the other two, and all three venues saw long-term growth."</a:t>
-            </a:r>
-            <a:endParaRPr lang="en-US" sz="2625" dirty="0"/>
+              <a:t> visitors than the other two, and all three venues saw long-term growth."</a:t>
+            </a:r>
           </a:p>
         </p:txBody>
       </p:sp>
@@ -7065,7 +7133,7 @@
                 <a:ea typeface="Inter" pitchFamily="34" charset="-122"/>
                 <a:cs typeface="Inter" pitchFamily="34" charset="-120"/>
               </a:rPr>
-              <a:t>Lesson 4 of 8 · IELTS Writing Task 1 · orangeenglish.nl</a:t>
+              <a:t>Lesson 4 of 6 · IELTS Writing Task 1 · orangeenglish.nl</a:t>
             </a:r>
             <a:endParaRPr lang="en-US" sz="1800" dirty="0"/>
           </a:p>
@@ -7156,6 +7224,10 @@
           </a:solidFill>
           <a:ln/>
         </p:spPr>
+        <p:txBody>
+          <a:bodyPr/>
+          <a:p/>
+        </p:txBody>
       </p:sp>
       <p:pic>
         <p:nvPicPr>
@@ -7404,6 +7476,10 @@
             <a:prstDash val="solid"/>
           </a:ln>
         </p:spPr>
+        <p:txBody>
+          <a:bodyPr/>
+          <a:p/>
+        </p:txBody>
       </p:sp>
       <p:sp>
         <p:nvSpPr>
@@ -7476,6 +7552,10 @@
             <a:prstDash val="solid"/>
           </a:ln>
         </p:spPr>
+        <p:txBody>
+          <a:bodyPr/>
+          <a:p/>
+        </p:txBody>
       </p:sp>
       <p:sp>
         <p:nvSpPr>
@@ -7548,6 +7628,10 @@
             <a:prstDash val="solid"/>
           </a:ln>
         </p:spPr>
+        <p:txBody>
+          <a:bodyPr/>
+          <a:p/>
+        </p:txBody>
       </p:sp>
       <p:sp>
         <p:nvSpPr>
@@ -7620,6 +7704,10 @@
             <a:prstDash val="solid"/>
           </a:ln>
         </p:spPr>
+        <p:txBody>
+          <a:bodyPr/>
+          <a:p/>
+        </p:txBody>
       </p:sp>
       <p:sp>
         <p:nvSpPr>
@@ -7727,6 +7815,10 @@
           </a:solidFill>
           <a:ln/>
         </p:spPr>
+        <p:txBody>
+          <a:bodyPr/>
+          <a:p/>
+        </p:txBody>
       </p:sp>
       <p:sp>
         <p:nvSpPr>
@@ -7758,6 +7850,10 @@
             <a:prstDash val="solid"/>
           </a:ln>
         </p:spPr>
+        <p:txBody>
+          <a:bodyPr/>
+          <a:p/>
+        </p:txBody>
       </p:sp>
       <p:sp>
         <p:nvSpPr>
@@ -7865,6 +7961,10 @@
           </a:solidFill>
           <a:ln/>
         </p:spPr>
+        <p:txBody>
+          <a:bodyPr/>
+          <a:p/>
+        </p:txBody>
       </p:sp>
       <p:sp>
         <p:nvSpPr>
@@ -7896,6 +7996,10 @@
             <a:prstDash val="solid"/>
           </a:ln>
         </p:spPr>
+        <p:txBody>
+          <a:bodyPr/>
+          <a:p/>
+        </p:txBody>
       </p:sp>
       <p:sp>
         <p:nvSpPr>
@@ -8003,6 +8107,10 @@
           </a:solidFill>
           <a:ln/>
         </p:spPr>
+        <p:txBody>
+          <a:bodyPr/>
+          <a:p/>
+        </p:txBody>
       </p:sp>
       <p:sp>
         <p:nvSpPr>
@@ -8034,6 +8142,10 @@
             <a:prstDash val="solid"/>
           </a:ln>
         </p:spPr>
+        <p:txBody>
+          <a:bodyPr/>
+          <a:p/>
+        </p:txBody>
       </p:sp>
       <p:sp>
         <p:nvSpPr>
@@ -8141,6 +8253,10 @@
           </a:solidFill>
           <a:ln/>
         </p:spPr>
+        <p:txBody>
+          <a:bodyPr/>
+          <a:p/>
+        </p:txBody>
       </p:sp>
       <p:sp>
         <p:nvSpPr>
@@ -8177,7 +8293,7 @@
                 <a:ea typeface="Inter" pitchFamily="34" charset="-122"/>
                 <a:cs typeface="Inter" pitchFamily="34" charset="-120"/>
               </a:rPr>
-              <a:t>Lesson 4 of 8 · IELTS Writing Task 1 · orangeenglish.nl</a:t>
+              <a:t>Lesson 4 of 6 · IELTS Writing Task 1 · orangeenglish.nl</a:t>
             </a:r>
             <a:endParaRPr lang="en-US" sz="1800" dirty="0"/>
           </a:p>
@@ -8268,6 +8384,10 @@
           </a:solidFill>
           <a:ln/>
         </p:spPr>
+        <p:txBody>
+          <a:bodyPr/>
+          <a:p/>
+        </p:txBody>
       </p:sp>
       <p:pic>
         <p:nvPicPr>
@@ -8420,6 +8540,10 @@
           </a:solidFill>
           <a:ln/>
         </p:spPr>
+        <p:txBody>
+          <a:bodyPr/>
+          <a:p/>
+        </p:txBody>
       </p:sp>
       <p:sp>
         <p:nvSpPr>
@@ -8459,7 +8583,7 @@
                 <a:ea typeface="Inter" pitchFamily="34" charset="-122"/>
                 <a:cs typeface="Inter" pitchFamily="34" charset="-120"/>
               </a:rPr>
-              <a:t>Every Task 1 answer follows the same shape: </a:t>
+              <a:t>A reliable shape for any line graph: </a:t>
             </a:r>
             <a:pPr algn="l" indent="0" marL="0">
               <a:lnSpc>
@@ -8552,6 +8676,10 @@
           </a:solidFill>
           <a:ln/>
         </p:spPr>
+        <p:txBody>
+          <a:bodyPr/>
+          <a:p/>
+        </p:txBody>
       </p:sp>
       <p:sp>
         <p:nvSpPr>
@@ -8633,6 +8761,10 @@
           </a:solidFill>
           <a:ln/>
         </p:spPr>
+        <p:txBody>
+          <a:bodyPr/>
+          <a:p/>
+        </p:txBody>
       </p:sp>
       <p:sp>
         <p:nvSpPr>
@@ -8689,7 +8821,7 @@
                 <a:ea typeface="Inter" pitchFamily="34" charset="-122"/>
                 <a:cs typeface="Inter" pitchFamily="34" charset="-120"/>
               </a:rPr>
-              <a:t>free of numbers</a:t>
+              <a:t>free of detailed figures</a:t>
             </a:r>
             <a:pPr algn="l" indent="0" marL="0">
               <a:lnSpc>
@@ -8706,7 +8838,7 @@
                 <a:ea typeface="Inter" pitchFamily="34" charset="-122"/>
                 <a:cs typeface="Inter" pitchFamily="34" charset="-120"/>
               </a:rPr>
-              <a:t>; save every figure for the body paragraphs.</a:t>
+              <a:t>; save them for the body paragraphs.</a:t>
             </a:r>
             <a:endParaRPr lang="en-US" sz="2400" dirty="0"/>
           </a:p>
@@ -8731,6 +8863,10 @@
           </a:solidFill>
           <a:ln/>
         </p:spPr>
+        <p:txBody>
+          <a:bodyPr/>
+          <a:p/>
+        </p:txBody>
       </p:sp>
       <p:sp>
         <p:nvSpPr>
@@ -8910,7 +9046,7 @@
                 <a:ea typeface="Inter" pitchFamily="34" charset="-122"/>
                 <a:cs typeface="Inter" pitchFamily="34" charset="-120"/>
               </a:rPr>
-              <a:t>Lesson 4 of 8 · IELTS Writing Task 1 · orangeenglish.nl</a:t>
+              <a:t>Lesson 4 of 6 · IELTS Writing Task 1 · orangeenglish.nl</a:t>
             </a:r>
             <a:endParaRPr lang="en-US" sz="1800" dirty="0"/>
           </a:p>
